--- a/public/fun/pack/pptx/reviewpro/보장점검양식프리미엄_04_부모님점검_화이트골드.pptx
+++ b/public/fun/pack/pptx/reviewpro/보장점검양식프리미엄_04_부모님점검_화이트골드.pptx
@@ -112,12 +112,12 @@
   <p:extLst>
     <p:ext uri="{521415D9-36F7-43E2-AB2F-B90AF26B5E84}">
       <p14:sectionLst xmlns:p14="http://schemas.microsoft.com/office/powerpoint/2010/main">
-        <p14:section name="시작" id="{481999FF-99E5-43F1-8D3A-7A730C11EBED}">
+        <p14:section name="시작" id="{F043281B-0406-4CE1-BBB8-31D73E568D5D}">
           <p14:sldIdLst>
             <p14:sldId id="256"/>
           </p14:sldIdLst>
         </p14:section>
-        <p14:section name="본문" id="{CEFFDAA3-1E95-4243-A25F-0AB0A58C4363}">
+        <p14:section name="본문" id="{62AACAFB-0B8D-40C9-85B2-5877C814BB98}">
           <p14:sldIdLst>
             <p14:sldId id="257"/>
             <p14:sldId id="258"/>
@@ -1681,7 +1681,7 @@
             </a:lvl1pPr>
           </a:lstStyle>
           <a:p>
-            <a:fld id="{8F141F6D-9EED-4126-B331-2E1D0802815A}" type="slidenum">
+            <a:fld id="{1B3250AD-562E-43A9-ACD7-FDB294BDD613}" type="slidenum">
               <a:rPr lang="en-US"/>
               <a:t>‹#›</a:t>
             </a:fld>
@@ -2492,7 +2492,7 @@
             </a:lvl1pPr>
           </a:lstStyle>
           <a:p>
-            <a:fld id="{70A2F981-3B52-4678-BBCF-568355D182E2}" type="slidenum">
+            <a:fld id="{D51EB995-0051-4F94-8659-FFDBC7705A3A}" type="slidenum">
               <a:rPr lang="en-US"/>
               <a:t>‹#›</a:t>
             </a:fld>
@@ -3176,7 +3176,7 @@
             </a:lvl1pPr>
           </a:lstStyle>
           <a:p>
-            <a:fld id="{A99AECA4-F0FC-403D-8852-3CA42A402D08}" type="slidenum">
+            <a:fld id="{D61F59B7-BD96-4217-B2A9-9304FEFD6CC3}" type="slidenum">
               <a:rPr lang="en-US"/>
               <a:t>‹#›</a:t>
             </a:fld>
@@ -4021,7 +4021,7 @@
           <a:p>
             <a:r>
               <a:rPr lang="ko-KR"/>
-              <a:t>부모님 점검 · 0000. 00. 00</a:t>
+              <a:t>부모님 점검 · 날짜 입력</a:t>
             </a:r>
           </a:p>
           <a:p>
@@ -4112,7 +4112,7 @@
           <a:bodyPr/>
           <a:lstStyle/>
           <a:p>
-            <a:fld id="{43AC1855-A886-48D3-BD82-5037936A7245}" type="slidenum">
+            <a:fld id="{234B1F38-8623-4376-8A1A-FF8A0E791BB6}" type="slidenum">
               <a:rPr lang="en-US"/>
               <a:t>‹#›</a:t>
             </a:fld>
@@ -4825,7 +4825,7 @@
           <a:bodyPr/>
           <a:lstStyle/>
           <a:p>
-            <a:fld id="{F549A13E-BD8D-4FBF-9F6F-8C83957D91E0}" type="slidenum">
+            <a:fld id="{F3B83303-BD2F-46BA-ABEA-7B3D10A718FC}" type="slidenum">
               <a:rPr lang="en-US"/>
               <a:t>‹#›</a:t>
             </a:fld>
@@ -6331,7 +6331,7 @@
           <a:bodyPr/>
           <a:lstStyle/>
           <a:p>
-            <a:fld id="{4C4A61D6-159F-4801-9CB2-749368D133D7}" type="slidenum">
+            <a:fld id="{389DF3C0-A2EB-4888-843B-AA8DCA927B21}" type="slidenum">
               <a:rPr lang="en-US"/>
               <a:t>‹#›</a:t>
             </a:fld>
@@ -7881,7 +7881,7 @@
           <a:bodyPr/>
           <a:lstStyle/>
           <a:p>
-            <a:fld id="{04163FCB-0FD9-4F33-B845-5D9699FF63D4}" type="slidenum">
+            <a:fld id="{D028721F-4999-4E77-ABCA-87E976DFAD04}" type="slidenum">
               <a:rPr lang="en-US"/>
               <a:t>‹#›</a:t>
             </a:fld>
@@ -8809,7 +8809,7 @@
           <a:bodyPr/>
           <a:lstStyle/>
           <a:p>
-            <a:fld id="{853F5CAF-89B6-4CA3-B773-A55364408045}" type="slidenum">
+            <a:fld id="{0512D961-B34C-4300-AF69-207EBCE7B3EA}" type="slidenum">
               <a:rPr lang="en-US"/>
               <a:t>‹#›</a:t>
             </a:fld>
